--- a/Manmeet Kaur - MediMatch.pptx
+++ b/Manmeet Kaur - MediMatch.pptx
@@ -223,7 +223,7 @@
           <a:p>
             <a:fld id="{46256A78-79A6-408F-8148-4F87BB81602D}" type="datetimeFigureOut">
               <a:rPr lang="en-IN" smtClean="0"/>
-              <a:t>9/11/2026</a:t>
+              <a:t>9/28/2026</a:t>
             </a:fld>
             <a:endParaRPr lang="en-IN"/>
           </a:p>
@@ -709,7 +709,7 @@
           <p:cNvPr id="8" name="Date Placeholder 7">
             <a:extLst>
               <a:ext uri="{FF2B5EF4-FFF2-40B4-BE49-F238E27FC236}">
-                <a16:creationId xmlns:a16="http://schemas.microsoft.com/office/drawing/2014/main" xmlns="" id="{7FA0ACE7-29A8-47D3-A7D9-257B711D8023}"/>
+                <a16:creationId xmlns="" xmlns:a16="http://schemas.microsoft.com/office/drawing/2014/main" id="{7FA0ACE7-29A8-47D3-A7D9-257B711D8023}"/>
               </a:ext>
             </a:extLst>
           </p:cNvPr>
@@ -727,7 +727,7 @@
           <a:p>
             <a:fld id="{ED291B17-9318-49DB-B28B-6E5994AE9581}" type="datetime1">
               <a:rPr lang="en-US" smtClean="0"/>
-              <a:t>9/11/2026</a:t>
+              <a:t>9/28/2026</a:t>
             </a:fld>
             <a:endParaRPr lang="en-US"/>
           </a:p>
@@ -738,7 +738,7 @@
           <p:cNvPr id="9" name="Footer Placeholder 8">
             <a:extLst>
               <a:ext uri="{FF2B5EF4-FFF2-40B4-BE49-F238E27FC236}">
-                <a16:creationId xmlns:a16="http://schemas.microsoft.com/office/drawing/2014/main" xmlns="" id="{DEC604B9-52E9-4810-8359-47206518D038}"/>
+                <a16:creationId xmlns="" xmlns:a16="http://schemas.microsoft.com/office/drawing/2014/main" id="{DEC604B9-52E9-4810-8359-47206518D038}"/>
               </a:ext>
             </a:extLst>
           </p:cNvPr>
@@ -771,7 +771,7 @@
           <p:cNvPr id="10" name="Slide Number Placeholder 9">
             <a:extLst>
               <a:ext uri="{FF2B5EF4-FFF2-40B4-BE49-F238E27FC236}">
-                <a16:creationId xmlns:a16="http://schemas.microsoft.com/office/drawing/2014/main" xmlns="" id="{5898A89F-CA25-400F-B05A-AECBF2517E4F}"/>
+                <a16:creationId xmlns="" xmlns:a16="http://schemas.microsoft.com/office/drawing/2014/main" id="{5898A89F-CA25-400F-B05A-AECBF2517E4F}"/>
               </a:ext>
             </a:extLst>
           </p:cNvPr>
@@ -936,7 +936,7 @@
           <a:p>
             <a:fld id="{2CED4963-E985-44C4-B8C4-FDD613B7C2F8}" type="datetime1">
               <a:rPr lang="en-US" smtClean="0"/>
-              <a:t>9/11/2026</a:t>
+              <a:t>9/28/2026</a:t>
             </a:fld>
             <a:endParaRPr lang="en-US"/>
           </a:p>
@@ -1157,7 +1157,7 @@
           <p:cNvPr id="8" name="Rectangle 7">
             <a:extLst>
               <a:ext uri="{FF2B5EF4-FFF2-40B4-BE49-F238E27FC236}">
-                <a16:creationId xmlns:a16="http://schemas.microsoft.com/office/drawing/2014/main" xmlns="" id="{F6423B97-A5D4-47B9-8861-73B3707A04CF}"/>
+                <a16:creationId xmlns="" xmlns:a16="http://schemas.microsoft.com/office/drawing/2014/main" id="{F6423B97-A5D4-47B9-8861-73B3707A04CF}"/>
               </a:ext>
             </a:extLst>
           </p:cNvPr>
@@ -1200,7 +1200,7 @@
           <p:cNvPr id="9" name="Rectangle 8">
             <a:extLst>
               <a:ext uri="{FF2B5EF4-FFF2-40B4-BE49-F238E27FC236}">
-                <a16:creationId xmlns:a16="http://schemas.microsoft.com/office/drawing/2014/main" xmlns="" id="{1AEC0421-37B4-4481-A10D-69FDF5EC7909}"/>
+                <a16:creationId xmlns="" xmlns:a16="http://schemas.microsoft.com/office/drawing/2014/main" id="{1AEC0421-37B4-4481-A10D-69FDF5EC7909}"/>
               </a:ext>
             </a:extLst>
           </p:cNvPr>
@@ -1243,7 +1243,7 @@
           <p:cNvPr id="10" name="Rectangle 9">
             <a:extLst>
               <a:ext uri="{FF2B5EF4-FFF2-40B4-BE49-F238E27FC236}">
-                <a16:creationId xmlns:a16="http://schemas.microsoft.com/office/drawing/2014/main" xmlns="" id="{5F7265B5-9F97-4F1E-99E9-74F7B7E62337}"/>
+                <a16:creationId xmlns="" xmlns:a16="http://schemas.microsoft.com/office/drawing/2014/main" id="{5F7265B5-9F97-4F1E-99E9-74F7B7E62337}"/>
               </a:ext>
             </a:extLst>
           </p:cNvPr>
@@ -1286,7 +1286,7 @@
           <p:cNvPr id="11" name="Date Placeholder 10">
             <a:extLst>
               <a:ext uri="{FF2B5EF4-FFF2-40B4-BE49-F238E27FC236}">
-                <a16:creationId xmlns:a16="http://schemas.microsoft.com/office/drawing/2014/main" xmlns="" id="{5C74A470-3BD3-4F33-80E5-67E6E87FCBE7}"/>
+                <a16:creationId xmlns="" xmlns:a16="http://schemas.microsoft.com/office/drawing/2014/main" id="{5C74A470-3BD3-4F33-80E5-67E6E87FCBE7}"/>
               </a:ext>
             </a:extLst>
           </p:cNvPr>
@@ -1304,7 +1304,7 @@
           <a:p>
             <a:fld id="{ED291B17-9318-49DB-B28B-6E5994AE9581}" type="datetime1">
               <a:rPr lang="en-US" smtClean="0"/>
-              <a:t>9/11/2026</a:t>
+              <a:t>9/28/2026</a:t>
             </a:fld>
             <a:endParaRPr lang="en-US"/>
           </a:p>
@@ -1315,7 +1315,7 @@
           <p:cNvPr id="12" name="Footer Placeholder 11">
             <a:extLst>
               <a:ext uri="{FF2B5EF4-FFF2-40B4-BE49-F238E27FC236}">
-                <a16:creationId xmlns:a16="http://schemas.microsoft.com/office/drawing/2014/main" xmlns="" id="{9A3A30BA-DB50-4D7D-BCDE-17D20FB354DF}"/>
+                <a16:creationId xmlns="" xmlns:a16="http://schemas.microsoft.com/office/drawing/2014/main" id="{9A3A30BA-DB50-4D7D-BCDE-17D20FB354DF}"/>
               </a:ext>
             </a:extLst>
           </p:cNvPr>
@@ -1348,7 +1348,7 @@
           <p:cNvPr id="13" name="Slide Number Placeholder 12">
             <a:extLst>
               <a:ext uri="{FF2B5EF4-FFF2-40B4-BE49-F238E27FC236}">
-                <a16:creationId xmlns:a16="http://schemas.microsoft.com/office/drawing/2014/main" xmlns="" id="{76FF9E58-C0B2-436B-A21C-DB45A00D6515}"/>
+                <a16:creationId xmlns="" xmlns:a16="http://schemas.microsoft.com/office/drawing/2014/main" id="{76FF9E58-C0B2-436B-A21C-DB45A00D6515}"/>
               </a:ext>
             </a:extLst>
           </p:cNvPr>
@@ -1490,7 +1490,7 @@
           <p:cNvPr id="8" name="Date Placeholder 7">
             <a:extLst>
               <a:ext uri="{FF2B5EF4-FFF2-40B4-BE49-F238E27FC236}">
-                <a16:creationId xmlns:a16="http://schemas.microsoft.com/office/drawing/2014/main" xmlns="" id="{770E6237-3456-439F-802D-3BA93FC7E3E5}"/>
+                <a16:creationId xmlns="" xmlns:a16="http://schemas.microsoft.com/office/drawing/2014/main" id="{770E6237-3456-439F-802D-3BA93FC7E3E5}"/>
               </a:ext>
             </a:extLst>
           </p:cNvPr>
@@ -1508,7 +1508,7 @@
           <a:p>
             <a:fld id="{78DD82B9-B8EE-4375-B6FF-88FA6ABB15D9}" type="datetime1">
               <a:rPr lang="en-US" smtClean="0"/>
-              <a:t>9/11/2026</a:t>
+              <a:t>9/28/2026</a:t>
             </a:fld>
             <a:endParaRPr lang="en-US"/>
           </a:p>
@@ -1747,7 +1747,7 @@
           <p:cNvPr id="7" name="Date Placeholder 6">
             <a:extLst>
               <a:ext uri="{FF2B5EF4-FFF2-40B4-BE49-F238E27FC236}">
-                <a16:creationId xmlns:a16="http://schemas.microsoft.com/office/drawing/2014/main" xmlns="" id="{61582016-5696-4A93-887F-BBB3B9002FE5}"/>
+                <a16:creationId xmlns="" xmlns:a16="http://schemas.microsoft.com/office/drawing/2014/main" id="{61582016-5696-4A93-887F-BBB3B9002FE5}"/>
               </a:ext>
             </a:extLst>
           </p:cNvPr>
@@ -1765,7 +1765,7 @@
           <a:p>
             <a:fld id="{B2497495-0637-405E-AE64-5CC7506D51F5}" type="datetime1">
               <a:rPr lang="en-US" smtClean="0"/>
-              <a:t>9/11/2026</a:t>
+              <a:t>9/28/2026</a:t>
             </a:fld>
             <a:endParaRPr lang="en-US"/>
           </a:p>
@@ -1776,7 +1776,7 @@
           <p:cNvPr id="9" name="Footer Placeholder 8">
             <a:extLst>
               <a:ext uri="{FF2B5EF4-FFF2-40B4-BE49-F238E27FC236}">
-                <a16:creationId xmlns:a16="http://schemas.microsoft.com/office/drawing/2014/main" xmlns="" id="{857CFCD5-1192-4E18-8A8F-29E153B44DA4}"/>
+                <a16:creationId xmlns="" xmlns:a16="http://schemas.microsoft.com/office/drawing/2014/main" id="{857CFCD5-1192-4E18-8A8F-29E153B44DA4}"/>
               </a:ext>
             </a:extLst>
           </p:cNvPr>
@@ -1809,7 +1809,7 @@
           <p:cNvPr id="10" name="Slide Number Placeholder 9">
             <a:extLst>
               <a:ext uri="{FF2B5EF4-FFF2-40B4-BE49-F238E27FC236}">
-                <a16:creationId xmlns:a16="http://schemas.microsoft.com/office/drawing/2014/main" xmlns="" id="{E39A109E-5018-4794-92B3-FD5E5BCD95E8}"/>
+                <a16:creationId xmlns="" xmlns:a16="http://schemas.microsoft.com/office/drawing/2014/main" id="{E39A109E-5018-4794-92B3-FD5E5BCD95E8}"/>
               </a:ext>
             </a:extLst>
           </p:cNvPr>
@@ -2023,7 +2023,7 @@
           <a:p>
             <a:fld id="{7BFFD690-9426-415D-8B65-26881E07B2D4}" type="datetime1">
               <a:rPr lang="en-US" smtClean="0"/>
-              <a:t>9/11/2026</a:t>
+              <a:t>9/28/2026</a:t>
             </a:fld>
             <a:endParaRPr lang="en-US"/>
           </a:p>
@@ -2450,7 +2450,7 @@
           <a:p>
             <a:fld id="{04C4989A-474C-40DE-95B9-011C28B71673}" type="datetime1">
               <a:rPr lang="en-US" smtClean="0"/>
-              <a:t>9/11/2026</a:t>
+              <a:t>9/28/2026</a:t>
             </a:fld>
             <a:endParaRPr lang="en-US"/>
           </a:p>
@@ -2580,7 +2580,7 @@
           <a:p>
             <a:fld id="{5DB4ED54-5B5E-4A04-93D3-5772E3CE3818}" type="datetime1">
               <a:rPr lang="en-US" smtClean="0"/>
-              <a:t>9/11/2026</a:t>
+              <a:t>9/28/2026</a:t>
             </a:fld>
             <a:endParaRPr lang="en-US"/>
           </a:p>
@@ -2683,7 +2683,7 @@
           <a:p>
             <a:fld id="{4EDE50D6-574B-40AF-946F-D52A04ADE379}" type="datetime1">
               <a:rPr lang="en-US" smtClean="0"/>
-              <a:t>9/11/2026</a:t>
+              <a:t>9/28/2026</a:t>
             </a:fld>
             <a:endParaRPr lang="en-US"/>
           </a:p>
@@ -3043,7 +3043,7 @@
           <p:cNvPr id="8" name="Date Placeholder 7">
             <a:extLst>
               <a:ext uri="{FF2B5EF4-FFF2-40B4-BE49-F238E27FC236}">
-                <a16:creationId xmlns:a16="http://schemas.microsoft.com/office/drawing/2014/main" xmlns="" id="{0B919CC2-2A65-446F-B538-9E6249035445}"/>
+                <a16:creationId xmlns="" xmlns:a16="http://schemas.microsoft.com/office/drawing/2014/main" id="{0B919CC2-2A65-446F-B538-9E6249035445}"/>
               </a:ext>
             </a:extLst>
           </p:cNvPr>
@@ -3066,7 +3066,7 @@
           <a:p>
             <a:fld id="{D82884F1-FFEA-405F-9602-3DCA865EDA4E}" type="datetime1">
               <a:rPr lang="en-US" smtClean="0"/>
-              <a:t>9/11/2026</a:t>
+              <a:t>9/28/2026</a:t>
             </a:fld>
             <a:endParaRPr lang="en-US"/>
           </a:p>
@@ -3077,7 +3077,7 @@
           <p:cNvPr id="10" name="Footer Placeholder 9">
             <a:extLst>
               <a:ext uri="{FF2B5EF4-FFF2-40B4-BE49-F238E27FC236}">
-                <a16:creationId xmlns:a16="http://schemas.microsoft.com/office/drawing/2014/main" xmlns="" id="{B72412AE-119E-4982-8B24-63365EFCA796}"/>
+                <a16:creationId xmlns="" xmlns:a16="http://schemas.microsoft.com/office/drawing/2014/main" id="{B72412AE-119E-4982-8B24-63365EFCA796}"/>
               </a:ext>
             </a:extLst>
           </p:cNvPr>
@@ -3110,7 +3110,7 @@
           <p:cNvPr id="11" name="Slide Number Placeholder 10">
             <a:extLst>
               <a:ext uri="{FF2B5EF4-FFF2-40B4-BE49-F238E27FC236}">
-                <a16:creationId xmlns:a16="http://schemas.microsoft.com/office/drawing/2014/main" xmlns="" id="{7FC4BB19-6AD1-45CF-9F99-00B109890FAB}"/>
+                <a16:creationId xmlns="" xmlns:a16="http://schemas.microsoft.com/office/drawing/2014/main" id="{7FC4BB19-6AD1-45CF-9F99-00B109890FAB}"/>
               </a:ext>
             </a:extLst>
           </p:cNvPr>
@@ -3360,7 +3360,7 @@
           <a:p>
             <a:fld id="{7E18DB4A-8810-4A10-AD5C-D5E2C667F5B3}" type="datetime1">
               <a:rPr lang="en-US" smtClean="0"/>
-              <a:t>9/11/2026</a:t>
+              <a:t>9/28/2026</a:t>
             </a:fld>
             <a:endParaRPr lang="en-US"/>
           </a:p>
@@ -3581,7 +3581,7 @@
           <a:p>
             <a:fld id="{ED291B17-9318-49DB-B28B-6E5994AE9581}" type="datetime1">
               <a:rPr lang="en-US" smtClean="0"/>
-              <a:t>9/11/2026</a:t>
+              <a:t>9/28/2026</a:t>
             </a:fld>
             <a:endParaRPr lang="en-US"/>
           </a:p>
@@ -3745,7 +3745,7 @@
           <p:cNvPr id="8" name="Picture 7" descr="Logo&#10;&#10;Description automatically generated">
             <a:extLst>
               <a:ext uri="{FF2B5EF4-FFF2-40B4-BE49-F238E27FC236}">
-                <a16:creationId xmlns:a16="http://schemas.microsoft.com/office/drawing/2014/main" xmlns="" id="{14A64E4D-8DED-7830-2955-1BE78C5B0655}"/>
+                <a16:creationId xmlns="" xmlns:a16="http://schemas.microsoft.com/office/drawing/2014/main" id="{14A64E4D-8DED-7830-2955-1BE78C5B0655}"/>
               </a:ext>
             </a:extLst>
           </p:cNvPr>
@@ -4210,7 +4210,7 @@
           <p:cNvPr id="2" name="Title 1">
             <a:extLst>
               <a:ext uri="{FF2B5EF4-FFF2-40B4-BE49-F238E27FC236}">
-                <a16:creationId xmlns:a16="http://schemas.microsoft.com/office/drawing/2014/main" xmlns="" id="{A8A11E26-4C38-41A6-9857-11032CEECD80}"/>
+                <a16:creationId xmlns="" xmlns:a16="http://schemas.microsoft.com/office/drawing/2014/main" id="{A8A11E26-4C38-41A6-9857-11032CEECD80}"/>
               </a:ext>
             </a:extLst>
           </p:cNvPr>
@@ -4274,13 +4274,6 @@
               </a:rPr>
               <a:t>Compatibility and Matching Portal</a:t>
             </a:r>
-            <a:endParaRPr lang="en-US" sz="3000" b="1" i="1" dirty="0">
-              <a:solidFill>
-                <a:schemeClr val="accent1"/>
-              </a:solidFill>
-              <a:latin typeface="Arial" panose="020B0604020202020204" pitchFamily="34" charset="0"/>
-              <a:cs typeface="Arial" panose="020B0604020202020204" pitchFamily="34" charset="0"/>
-            </a:endParaRPr>
           </a:p>
         </p:txBody>
       </p:sp>
@@ -4331,7 +4324,7 @@
         <p:spPr>
           <a:xfrm>
             <a:off x="1173226" y="3556461"/>
-            <a:ext cx="7980183" cy="2554545"/>
+            <a:ext cx="9443439" cy="2554545"/>
           </a:xfrm>
           <a:prstGeom prst="rect">
             <a:avLst/>
@@ -4434,7 +4427,27 @@
                 <a:latin typeface="Arial"/>
                 <a:cs typeface="Arial"/>
               </a:rPr>
-              <a:t>Name – SGND Khalsa College, University of Delhi</a:t>
+              <a:t>Name – </a:t>
+            </a:r>
+            <a:r>
+              <a:rPr lang="en-US" sz="2000" b="1" dirty="0" smtClean="0">
+                <a:solidFill>
+                  <a:schemeClr val="bg1"/>
+                </a:solidFill>
+                <a:latin typeface="Arial"/>
+                <a:cs typeface="Arial"/>
+              </a:rPr>
+              <a:t>Sri Guru Nanak Dev </a:t>
+            </a:r>
+            <a:r>
+              <a:rPr lang="en-US" sz="2000" b="1" dirty="0" smtClean="0">
+                <a:solidFill>
+                  <a:schemeClr val="bg1"/>
+                </a:solidFill>
+                <a:latin typeface="Arial"/>
+                <a:cs typeface="Arial"/>
+              </a:rPr>
+              <a:t>Khalsa College, University of Delhi</a:t>
             </a:r>
             <a:endParaRPr lang="en-US" sz="2000" b="1" dirty="0">
               <a:solidFill>
@@ -4567,7 +4580,7 @@
           <p:cNvPr id="5" name="Title 4">
             <a:extLst>
               <a:ext uri="{FF2B5EF4-FFF2-40B4-BE49-F238E27FC236}">
-                <a16:creationId xmlns:a16="http://schemas.microsoft.com/office/drawing/2014/main" xmlns="" id="{8FBA75B4-2DD5-42EB-9397-F36BFB8BA723}"/>
+                <a16:creationId xmlns="" xmlns:a16="http://schemas.microsoft.com/office/drawing/2014/main" id="{8FBA75B4-2DD5-42EB-9397-F36BFB8BA723}"/>
               </a:ext>
             </a:extLst>
           </p:cNvPr>
@@ -4710,7 +4723,7 @@
           <p:cNvPr id="5" name="Title 4">
             <a:extLst>
               <a:ext uri="{FF2B5EF4-FFF2-40B4-BE49-F238E27FC236}">
-                <a16:creationId xmlns:a16="http://schemas.microsoft.com/office/drawing/2014/main" xmlns="" id="{8FBA75B4-2DD5-42EB-9397-F36BFB8BA723}"/>
+                <a16:creationId xmlns="" xmlns:a16="http://schemas.microsoft.com/office/drawing/2014/main" id="{8FBA75B4-2DD5-42EB-9397-F36BFB8BA723}"/>
               </a:ext>
             </a:extLst>
           </p:cNvPr>
@@ -4890,7 +4903,7 @@
           <p:cNvPr id="5" name="Title 4">
             <a:extLst>
               <a:ext uri="{FF2B5EF4-FFF2-40B4-BE49-F238E27FC236}">
-                <a16:creationId xmlns:a16="http://schemas.microsoft.com/office/drawing/2014/main" xmlns="" id="{8FBA75B4-2DD5-42EB-9397-F36BFB8BA723}"/>
+                <a16:creationId xmlns="" xmlns:a16="http://schemas.microsoft.com/office/drawing/2014/main" id="{8FBA75B4-2DD5-42EB-9397-F36BFB8BA723}"/>
               </a:ext>
             </a:extLst>
           </p:cNvPr>
@@ -5069,7 +5082,7 @@
           <p:cNvPr id="5" name="Title 4">
             <a:extLst>
               <a:ext uri="{FF2B5EF4-FFF2-40B4-BE49-F238E27FC236}">
-                <a16:creationId xmlns:a16="http://schemas.microsoft.com/office/drawing/2014/main" xmlns="" id="{8FBA75B4-2DD5-42EB-9397-F36BFB8BA723}"/>
+                <a16:creationId xmlns="" xmlns:a16="http://schemas.microsoft.com/office/drawing/2014/main" id="{8FBA75B4-2DD5-42EB-9397-F36BFB8BA723}"/>
               </a:ext>
             </a:extLst>
           </p:cNvPr>
@@ -5248,7 +5261,7 @@
           <p:cNvPr id="5" name="Title 4">
             <a:extLst>
               <a:ext uri="{FF2B5EF4-FFF2-40B4-BE49-F238E27FC236}">
-                <a16:creationId xmlns:a16="http://schemas.microsoft.com/office/drawing/2014/main" xmlns="" id="{8FBA75B4-2DD5-42EB-9397-F36BFB8BA723}"/>
+                <a16:creationId xmlns="" xmlns:a16="http://schemas.microsoft.com/office/drawing/2014/main" id="{8FBA75B4-2DD5-42EB-9397-F36BFB8BA723}"/>
               </a:ext>
             </a:extLst>
           </p:cNvPr>
@@ -5427,7 +5440,7 @@
           <p:cNvPr id="5" name="Title 4">
             <a:extLst>
               <a:ext uri="{FF2B5EF4-FFF2-40B4-BE49-F238E27FC236}">
-                <a16:creationId xmlns:a16="http://schemas.microsoft.com/office/drawing/2014/main" xmlns="" id="{8FBA75B4-2DD5-42EB-9397-F36BFB8BA723}"/>
+                <a16:creationId xmlns="" xmlns:a16="http://schemas.microsoft.com/office/drawing/2014/main" id="{8FBA75B4-2DD5-42EB-9397-F36BFB8BA723}"/>
               </a:ext>
             </a:extLst>
           </p:cNvPr>
@@ -5470,7 +5483,7 @@
           <p:cNvPr id="2" name="Content Placeholder 1">
             <a:extLst>
               <a:ext uri="{FF2B5EF4-FFF2-40B4-BE49-F238E27FC236}">
-                <a16:creationId xmlns:a16="http://schemas.microsoft.com/office/drawing/2014/main" xmlns="" id="{005E46AB-32C4-4B57-A2B1-50738A64BE1B}"/>
+                <a16:creationId xmlns="" xmlns:a16="http://schemas.microsoft.com/office/drawing/2014/main" id="{005E46AB-32C4-4B57-A2B1-50738A64BE1B}"/>
               </a:ext>
             </a:extLst>
           </p:cNvPr>
@@ -5595,7 +5608,7 @@
           <p:cNvPr id="3" name="Content Placeholder 2">
             <a:extLst>
               <a:ext uri="{FF2B5EF4-FFF2-40B4-BE49-F238E27FC236}">
-                <a16:creationId xmlns:a16="http://schemas.microsoft.com/office/drawing/2014/main" xmlns="" id="{A6638FD1-D00E-E75B-705C-564F06D93D7B}"/>
+                <a16:creationId xmlns="" xmlns:a16="http://schemas.microsoft.com/office/drawing/2014/main" id="{A6638FD1-D00E-E75B-705C-564F06D93D7B}"/>
               </a:ext>
             </a:extLst>
           </p:cNvPr>
@@ -5906,7 +5919,7 @@
           <p:cNvPr id="5" name="Title 4">
             <a:extLst>
               <a:ext uri="{FF2B5EF4-FFF2-40B4-BE49-F238E27FC236}">
-                <a16:creationId xmlns:a16="http://schemas.microsoft.com/office/drawing/2014/main" xmlns="" id="{3F968F13-9AC4-7120-7ACD-9F752C767D5D}"/>
+                <a16:creationId xmlns="" xmlns:a16="http://schemas.microsoft.com/office/drawing/2014/main" id="{3F968F13-9AC4-7120-7ACD-9F752C767D5D}"/>
               </a:ext>
             </a:extLst>
           </p:cNvPr>
@@ -6062,7 +6075,7 @@
           <p:cNvPr id="5" name="Title 4">
             <a:extLst>
               <a:ext uri="{FF2B5EF4-FFF2-40B4-BE49-F238E27FC236}">
-                <a16:creationId xmlns:a16="http://schemas.microsoft.com/office/drawing/2014/main" xmlns="" id="{8FBA75B4-2DD5-42EB-9397-F36BFB8BA723}"/>
+                <a16:creationId xmlns="" xmlns:a16="http://schemas.microsoft.com/office/drawing/2014/main" id="{8FBA75B4-2DD5-42EB-9397-F36BFB8BA723}"/>
               </a:ext>
             </a:extLst>
           </p:cNvPr>
@@ -6871,7 +6884,7 @@
           <p:cNvPr id="2" name="Title 1">
             <a:extLst>
               <a:ext uri="{FF2B5EF4-FFF2-40B4-BE49-F238E27FC236}">
-                <a16:creationId xmlns:a16="http://schemas.microsoft.com/office/drawing/2014/main" xmlns="" id="{3B4D7422-ED9D-D856-C6AD-0F1A715C2428}"/>
+                <a16:creationId xmlns="" xmlns:a16="http://schemas.microsoft.com/office/drawing/2014/main" id="{3B4D7422-ED9D-D856-C6AD-0F1A715C2428}"/>
               </a:ext>
             </a:extLst>
           </p:cNvPr>
@@ -6912,7 +6925,7 @@
           <p:cNvPr id="3" name="Content Placeholder 2">
             <a:extLst>
               <a:ext uri="{FF2B5EF4-FFF2-40B4-BE49-F238E27FC236}">
-                <a16:creationId xmlns:a16="http://schemas.microsoft.com/office/drawing/2014/main" xmlns="" id="{618C47C2-EF01-12B0-99EA-861F9629D1D9}"/>
+                <a16:creationId xmlns="" xmlns:a16="http://schemas.microsoft.com/office/drawing/2014/main" id="{618C47C2-EF01-12B0-99EA-861F9629D1D9}"/>
               </a:ext>
             </a:extLst>
           </p:cNvPr>
@@ -7029,7 +7042,7 @@
           <p:cNvPr id="5" name="Title 4">
             <a:extLst>
               <a:ext uri="{FF2B5EF4-FFF2-40B4-BE49-F238E27FC236}">
-                <a16:creationId xmlns:a16="http://schemas.microsoft.com/office/drawing/2014/main" xmlns="" id="{8BE4CA82-64EC-4D4E-A5E5-3EBB66E7B24C}"/>
+                <a16:creationId xmlns="" xmlns:a16="http://schemas.microsoft.com/office/drawing/2014/main" id="{8BE4CA82-64EC-4D4E-A5E5-3EBB66E7B24C}"/>
               </a:ext>
             </a:extLst>
           </p:cNvPr>
@@ -7108,7 +7121,7 @@
           <p:cNvPr id="2" name="Title 1">
             <a:extLst>
               <a:ext uri="{FF2B5EF4-FFF2-40B4-BE49-F238E27FC236}">
-                <a16:creationId xmlns:a16="http://schemas.microsoft.com/office/drawing/2014/main" xmlns="" id="{49FFEB4C-F209-4AE7-AA2B-B3C26CE2C51D}"/>
+                <a16:creationId xmlns="" xmlns:a16="http://schemas.microsoft.com/office/drawing/2014/main" id="{49FFEB4C-F209-4AE7-AA2B-B3C26CE2C51D}"/>
               </a:ext>
             </a:extLst>
           </p:cNvPr>
@@ -7149,7 +7162,7 @@
           <p:cNvPr id="3" name="Content Placeholder 2">
             <a:extLst>
               <a:ext uri="{FF2B5EF4-FFF2-40B4-BE49-F238E27FC236}">
-                <a16:creationId xmlns:a16="http://schemas.microsoft.com/office/drawing/2014/main" xmlns="" id="{B2678641-EEA3-4EC4-BF39-4075B0C120E8}"/>
+                <a16:creationId xmlns="" xmlns:a16="http://schemas.microsoft.com/office/drawing/2014/main" id="{B2678641-EEA3-4EC4-BF39-4075B0C120E8}"/>
               </a:ext>
             </a:extLst>
           </p:cNvPr>
@@ -7351,7 +7364,7 @@
           <p:cNvPr id="5" name="Title 4">
             <a:extLst>
               <a:ext uri="{FF2B5EF4-FFF2-40B4-BE49-F238E27FC236}">
-                <a16:creationId xmlns:a16="http://schemas.microsoft.com/office/drawing/2014/main" xmlns="" id="{8FBA75B4-2DD5-42EB-9397-F36BFB8BA723}"/>
+                <a16:creationId xmlns="" xmlns:a16="http://schemas.microsoft.com/office/drawing/2014/main" id="{8FBA75B4-2DD5-42EB-9397-F36BFB8BA723}"/>
               </a:ext>
             </a:extLst>
           </p:cNvPr>
@@ -7393,7 +7406,7 @@
           <p:cNvPr id="2" name="Content Placeholder 1">
             <a:extLst>
               <a:ext uri="{FF2B5EF4-FFF2-40B4-BE49-F238E27FC236}">
-                <a16:creationId xmlns:a16="http://schemas.microsoft.com/office/drawing/2014/main" xmlns="" id="{8FEE4A9C-3F57-7DA7-91FD-715C3FB47F93}"/>
+                <a16:creationId xmlns="" xmlns:a16="http://schemas.microsoft.com/office/drawing/2014/main" id="{8FEE4A9C-3F57-7DA7-91FD-715C3FB47F93}"/>
               </a:ext>
             </a:extLst>
           </p:cNvPr>
@@ -7497,7 +7510,7 @@
           <p:cNvPr id="5" name="Title 4">
             <a:extLst>
               <a:ext uri="{FF2B5EF4-FFF2-40B4-BE49-F238E27FC236}">
-                <a16:creationId xmlns:a16="http://schemas.microsoft.com/office/drawing/2014/main" xmlns="" id="{8FBA75B4-2DD5-42EB-9397-F36BFB8BA723}"/>
+                <a16:creationId xmlns="" xmlns:a16="http://schemas.microsoft.com/office/drawing/2014/main" id="{8FBA75B4-2DD5-42EB-9397-F36BFB8BA723}"/>
               </a:ext>
             </a:extLst>
           </p:cNvPr>
@@ -7539,7 +7552,7 @@
           <p:cNvPr id="2" name="Content Placeholder 1">
             <a:extLst>
               <a:ext uri="{FF2B5EF4-FFF2-40B4-BE49-F238E27FC236}">
-                <a16:creationId xmlns:a16="http://schemas.microsoft.com/office/drawing/2014/main" xmlns="" id="{E041FD9D-DF07-9C37-1E61-1D920E0EF1D4}"/>
+                <a16:creationId xmlns="" xmlns:a16="http://schemas.microsoft.com/office/drawing/2014/main" id="{E041FD9D-DF07-9C37-1E61-1D920E0EF1D4}"/>
               </a:ext>
             </a:extLst>
           </p:cNvPr>
@@ -7942,7 +7955,7 @@
           <p:cNvPr id="5" name="Title 4">
             <a:extLst>
               <a:ext uri="{FF2B5EF4-FFF2-40B4-BE49-F238E27FC236}">
-                <a16:creationId xmlns:a16="http://schemas.microsoft.com/office/drawing/2014/main" xmlns="" id="{8FBA75B4-2DD5-42EB-9397-F36BFB8BA723}"/>
+                <a16:creationId xmlns="" xmlns:a16="http://schemas.microsoft.com/office/drawing/2014/main" id="{8FBA75B4-2DD5-42EB-9397-F36BFB8BA723}"/>
               </a:ext>
             </a:extLst>
           </p:cNvPr>
@@ -8002,7 +8015,7 @@
           <p:cNvPr id="2" name="Content Placeholder 1">
             <a:extLst>
               <a:ext uri="{FF2B5EF4-FFF2-40B4-BE49-F238E27FC236}">
-                <a16:creationId xmlns:a16="http://schemas.microsoft.com/office/drawing/2014/main" xmlns="" id="{C4FFAF3C-BA60-9181-132C-C36C403AAEA7}"/>
+                <a16:creationId xmlns="" xmlns:a16="http://schemas.microsoft.com/office/drawing/2014/main" id="{C4FFAF3C-BA60-9181-132C-C36C403AAEA7}"/>
               </a:ext>
             </a:extLst>
           </p:cNvPr>
@@ -9923,7 +9936,7 @@
           <p:cNvPr id="5" name="Title 4">
             <a:extLst>
               <a:ext uri="{FF2B5EF4-FFF2-40B4-BE49-F238E27FC236}">
-                <a16:creationId xmlns:a16="http://schemas.microsoft.com/office/drawing/2014/main" xmlns="" id="{8FBA75B4-2DD5-42EB-9397-F36BFB8BA723}"/>
+                <a16:creationId xmlns="" xmlns:a16="http://schemas.microsoft.com/office/drawing/2014/main" id="{8FBA75B4-2DD5-42EB-9397-F36BFB8BA723}"/>
               </a:ext>
             </a:extLst>
           </p:cNvPr>
@@ -9934,7 +9947,12 @@
             <p:ph type="title"/>
           </p:nvPr>
         </p:nvSpPr>
-        <p:spPr/>
+        <p:spPr>
+          <a:xfrm>
+            <a:off x="581192" y="731032"/>
+            <a:ext cx="11029616" cy="530296"/>
+          </a:xfrm>
+        </p:spPr>
         <p:txBody>
           <a:bodyPr>
             <a:normAutofit fontScale="90000"/>
@@ -9961,7 +9979,7 @@
           <p:cNvPr id="2" name="Content Placeholder 1">
             <a:extLst>
               <a:ext uri="{FF2B5EF4-FFF2-40B4-BE49-F238E27FC236}">
-                <a16:creationId xmlns:a16="http://schemas.microsoft.com/office/drawing/2014/main" xmlns="" id="{F7F0871F-2198-9E37-C96F-3611AA199B60}"/>
+                <a16:creationId xmlns="" xmlns:a16="http://schemas.microsoft.com/office/drawing/2014/main" id="{F7F0871F-2198-9E37-C96F-3611AA199B60}"/>
               </a:ext>
             </a:extLst>
           </p:cNvPr>
@@ -10480,7 +10498,7 @@
           <p:cNvPr id="5" name="Title 4">
             <a:extLst>
               <a:ext uri="{FF2B5EF4-FFF2-40B4-BE49-F238E27FC236}">
-                <a16:creationId xmlns:a16="http://schemas.microsoft.com/office/drawing/2014/main" xmlns="" id="{8FBA75B4-2DD5-42EB-9397-F36BFB8BA723}"/>
+                <a16:creationId xmlns="" xmlns:a16="http://schemas.microsoft.com/office/drawing/2014/main" id="{8FBA75B4-2DD5-42EB-9397-F36BFB8BA723}"/>
               </a:ext>
             </a:extLst>
           </p:cNvPr>
@@ -11165,6 +11183,24 @@
 </file>
 
 <file path=customXml/item1.xml><?xml version="1.0" encoding="utf-8"?>
+<?mso-contentType ?>
+<FormTemplates xmlns="http://schemas.microsoft.com/sharepoint/v3/contenttype/forms">
+  <Display>DocumentLibraryForm</Display>
+  <Edit>DocumentLibraryForm</Edit>
+  <New>DocumentLibraryForm</New>
+</FormTemplates>
+</file>
+
+<file path=customXml/item2.xml><?xml version="1.0" encoding="utf-8"?>
+<p:properties xmlns:p="http://schemas.microsoft.com/office/2006/metadata/properties" xmlns:xsi="http://www.w3.org/2001/XMLSchema-instance" xmlns:pc="http://schemas.microsoft.com/office/infopath/2007/PartnerControls">
+  <documentManagement>
+    <MediaServiceKeyPoints xmlns="9162bd5b-4ed9-4da3-b376-05204580ba3f" xsi:nil="true"/>
+    <_activity xmlns="9162bd5b-4ed9-4da3-b376-05204580ba3f" xsi:nil="true"/>
+  </documentManagement>
+</p:properties>
+</file>
+
+<file path=customXml/item3.xml><?xml version="1.0" encoding="utf-8"?>
 <ct:contentTypeSchema xmlns:ct="http://schemas.microsoft.com/office/2006/metadata/contentType" xmlns:ma="http://schemas.microsoft.com/office/2006/metadata/properties/metaAttributes" ct:_="" ma:_="" ma:contentTypeName="Document" ma:contentTypeID="0x0101000F1872188ABCFC48BECA6C87E8AC3285" ma:contentTypeVersion="17" ma:contentTypeDescription="Create a new document." ma:contentTypeScope="" ma:versionID="55a158675e089c6a85ab0f83b89e1a15">
   <xsd:schema xmlns:xsd="http://www.w3.org/2001/XMLSchema" xmlns:xs="http://www.w3.org/2001/XMLSchema" xmlns:p="http://schemas.microsoft.com/office/2006/metadata/properties" xmlns:ns3="9162bd5b-4ed9-4da3-b376-05204580ba3f" xmlns:ns4="c0fa2617-96bd-425d-8578-e93563fe37c5" targetNamespace="http://schemas.microsoft.com/office/2006/metadata/properties" ma:root="true" ma:fieldsID="b35f082308864fa161c4a0a9eca35eff" ns3:_="" ns4:_="">
     <xsd:import namespace="9162bd5b-4ed9-4da3-b376-05204580ba3f"/>
@@ -11411,39 +11447,10 @@
 </ct:contentTypeSchema>
 </file>
 
-<file path=customXml/item2.xml><?xml version="1.0" encoding="utf-8"?>
-<p:properties xmlns:p="http://schemas.microsoft.com/office/2006/metadata/properties" xmlns:xsi="http://www.w3.org/2001/XMLSchema-instance" xmlns:pc="http://schemas.microsoft.com/office/infopath/2007/PartnerControls">
-  <documentManagement>
-    <MediaServiceKeyPoints xmlns="9162bd5b-4ed9-4da3-b376-05204580ba3f" xsi:nil="true"/>
-    <_activity xmlns="9162bd5b-4ed9-4da3-b376-05204580ba3f" xsi:nil="true"/>
-  </documentManagement>
-</p:properties>
-</file>
-
-<file path=customXml/item3.xml><?xml version="1.0" encoding="utf-8"?>
-<?mso-contentType ?>
-<FormTemplates xmlns="http://schemas.microsoft.com/sharepoint/v3/contenttype/forms">
-  <Display>DocumentLibraryForm</Display>
-  <Edit>DocumentLibraryForm</Edit>
-  <New>DocumentLibraryForm</New>
-</FormTemplates>
-</file>
-
 <file path=customXml/itemProps1.xml><?xml version="1.0" encoding="utf-8"?>
-<ds:datastoreItem xmlns:ds="http://schemas.openxmlformats.org/officeDocument/2006/customXml" ds:itemID="{6E816721-11E4-4989-8472-AB5A7EC20404}">
+<ds:datastoreItem xmlns:ds="http://schemas.openxmlformats.org/officeDocument/2006/customXml" ds:itemID="{927BD4C1-B6B1-4715-ABF9-E660A51A4EA0}">
   <ds:schemaRefs>
-    <ds:schemaRef ds:uri="9162bd5b-4ed9-4da3-b376-05204580ba3f"/>
-    <ds:schemaRef ds:uri="c0fa2617-96bd-425d-8578-e93563fe37c5"/>
-    <ds:schemaRef ds:uri="http://purl.org/dc/elements/1.1/"/>
-    <ds:schemaRef ds:uri="http://purl.org/dc/terms/"/>
-    <ds:schemaRef ds:uri="http://schemas.microsoft.com/internal/obd"/>
-    <ds:schemaRef ds:uri="http://schemas.microsoft.com/office/2006/documentManagement/types"/>
-    <ds:schemaRef ds:uri="http://schemas.microsoft.com/office/2006/metadata/contentType"/>
-    <ds:schemaRef ds:uri="http://schemas.microsoft.com/office/2006/metadata/properties"/>
-    <ds:schemaRef ds:uri="http://schemas.microsoft.com/office/2006/metadata/properties/metaAttributes"/>
-    <ds:schemaRef ds:uri="http://schemas.microsoft.com/office/infopath/2007/PartnerControls"/>
-    <ds:schemaRef ds:uri="http://schemas.openxmlformats.org/package/2006/metadata/core-properties"/>
-    <ds:schemaRef ds:uri="http://www.w3.org/2001/XMLSchema"/>
+    <ds:schemaRef ds:uri="http://schemas.microsoft.com/sharepoint/v3/contenttype/forms"/>
   </ds:schemaRefs>
 </ds:datastoreItem>
 </file>
@@ -11466,9 +11473,20 @@
 </file>
 
 <file path=customXml/itemProps3.xml><?xml version="1.0" encoding="utf-8"?>
-<ds:datastoreItem xmlns:ds="http://schemas.openxmlformats.org/officeDocument/2006/customXml" ds:itemID="{927BD4C1-B6B1-4715-ABF9-E660A51A4EA0}">
+<ds:datastoreItem xmlns:ds="http://schemas.openxmlformats.org/officeDocument/2006/customXml" ds:itemID="{6E816721-11E4-4989-8472-AB5A7EC20404}">
   <ds:schemaRefs>
-    <ds:schemaRef ds:uri="http://schemas.microsoft.com/sharepoint/v3/contenttype/forms"/>
+    <ds:schemaRef ds:uri="9162bd5b-4ed9-4da3-b376-05204580ba3f"/>
+    <ds:schemaRef ds:uri="c0fa2617-96bd-425d-8578-e93563fe37c5"/>
+    <ds:schemaRef ds:uri="http://purl.org/dc/elements/1.1/"/>
+    <ds:schemaRef ds:uri="http://purl.org/dc/terms/"/>
+    <ds:schemaRef ds:uri="http://schemas.microsoft.com/internal/obd"/>
+    <ds:schemaRef ds:uri="http://schemas.microsoft.com/office/2006/documentManagement/types"/>
+    <ds:schemaRef ds:uri="http://schemas.microsoft.com/office/2006/metadata/contentType"/>
+    <ds:schemaRef ds:uri="http://schemas.microsoft.com/office/2006/metadata/properties"/>
+    <ds:schemaRef ds:uri="http://schemas.microsoft.com/office/2006/metadata/properties/metaAttributes"/>
+    <ds:schemaRef ds:uri="http://schemas.microsoft.com/office/infopath/2007/PartnerControls"/>
+    <ds:schemaRef ds:uri="http://schemas.openxmlformats.org/package/2006/metadata/core-properties"/>
+    <ds:schemaRef ds:uri="http://www.w3.org/2001/XMLSchema"/>
   </ds:schemaRefs>
 </ds:datastoreItem>
 </file>
--- a/Manmeet Kaur - MediMatch.pptx
+++ b/Manmeet Kaur - MediMatch.pptx
@@ -223,7 +223,7 @@
           <a:p>
             <a:fld id="{46256A78-79A6-408F-8148-4F87BB81602D}" type="datetimeFigureOut">
               <a:rPr lang="en-IN" smtClean="0"/>
-              <a:t>9/28/2026</a:t>
+              <a:t>9/30/2026</a:t>
             </a:fld>
             <a:endParaRPr lang="en-IN"/>
           </a:p>
@@ -709,7 +709,7 @@
           <p:cNvPr id="8" name="Date Placeholder 7">
             <a:extLst>
               <a:ext uri="{FF2B5EF4-FFF2-40B4-BE49-F238E27FC236}">
-                <a16:creationId xmlns="" xmlns:a16="http://schemas.microsoft.com/office/drawing/2014/main" id="{7FA0ACE7-29A8-47D3-A7D9-257B711D8023}"/>
+                <a16:creationId xmlns:a16="http://schemas.microsoft.com/office/drawing/2014/main" xmlns="" id="{7FA0ACE7-29A8-47D3-A7D9-257B711D8023}"/>
               </a:ext>
             </a:extLst>
           </p:cNvPr>
@@ -727,7 +727,7 @@
           <a:p>
             <a:fld id="{ED291B17-9318-49DB-B28B-6E5994AE9581}" type="datetime1">
               <a:rPr lang="en-US" smtClean="0"/>
-              <a:t>9/28/2026</a:t>
+              <a:t>9/30/2026</a:t>
             </a:fld>
             <a:endParaRPr lang="en-US"/>
           </a:p>
@@ -738,7 +738,7 @@
           <p:cNvPr id="9" name="Footer Placeholder 8">
             <a:extLst>
               <a:ext uri="{FF2B5EF4-FFF2-40B4-BE49-F238E27FC236}">
-                <a16:creationId xmlns="" xmlns:a16="http://schemas.microsoft.com/office/drawing/2014/main" id="{DEC604B9-52E9-4810-8359-47206518D038}"/>
+                <a16:creationId xmlns:a16="http://schemas.microsoft.com/office/drawing/2014/main" xmlns="" id="{DEC604B9-52E9-4810-8359-47206518D038}"/>
               </a:ext>
             </a:extLst>
           </p:cNvPr>
@@ -771,7 +771,7 @@
           <p:cNvPr id="10" name="Slide Number Placeholder 9">
             <a:extLst>
               <a:ext uri="{FF2B5EF4-FFF2-40B4-BE49-F238E27FC236}">
-                <a16:creationId xmlns="" xmlns:a16="http://schemas.microsoft.com/office/drawing/2014/main" id="{5898A89F-CA25-400F-B05A-AECBF2517E4F}"/>
+                <a16:creationId xmlns:a16="http://schemas.microsoft.com/office/drawing/2014/main" xmlns="" id="{5898A89F-CA25-400F-B05A-AECBF2517E4F}"/>
               </a:ext>
             </a:extLst>
           </p:cNvPr>
@@ -936,7 +936,7 @@
           <a:p>
             <a:fld id="{2CED4963-E985-44C4-B8C4-FDD613B7C2F8}" type="datetime1">
               <a:rPr lang="en-US" smtClean="0"/>
-              <a:t>9/28/2026</a:t>
+              <a:t>9/30/2026</a:t>
             </a:fld>
             <a:endParaRPr lang="en-US"/>
           </a:p>
@@ -1157,7 +1157,7 @@
           <p:cNvPr id="8" name="Rectangle 7">
             <a:extLst>
               <a:ext uri="{FF2B5EF4-FFF2-40B4-BE49-F238E27FC236}">
-                <a16:creationId xmlns="" xmlns:a16="http://schemas.microsoft.com/office/drawing/2014/main" id="{F6423B97-A5D4-47B9-8861-73B3707A04CF}"/>
+                <a16:creationId xmlns:a16="http://schemas.microsoft.com/office/drawing/2014/main" xmlns="" id="{F6423B97-A5D4-47B9-8861-73B3707A04CF}"/>
               </a:ext>
             </a:extLst>
           </p:cNvPr>
@@ -1200,7 +1200,7 @@
           <p:cNvPr id="9" name="Rectangle 8">
             <a:extLst>
               <a:ext uri="{FF2B5EF4-FFF2-40B4-BE49-F238E27FC236}">
-                <a16:creationId xmlns="" xmlns:a16="http://schemas.microsoft.com/office/drawing/2014/main" id="{1AEC0421-37B4-4481-A10D-69FDF5EC7909}"/>
+                <a16:creationId xmlns:a16="http://schemas.microsoft.com/office/drawing/2014/main" xmlns="" id="{1AEC0421-37B4-4481-A10D-69FDF5EC7909}"/>
               </a:ext>
             </a:extLst>
           </p:cNvPr>
@@ -1243,7 +1243,7 @@
           <p:cNvPr id="10" name="Rectangle 9">
             <a:extLst>
               <a:ext uri="{FF2B5EF4-FFF2-40B4-BE49-F238E27FC236}">
-                <a16:creationId xmlns="" xmlns:a16="http://schemas.microsoft.com/office/drawing/2014/main" id="{5F7265B5-9F97-4F1E-99E9-74F7B7E62337}"/>
+                <a16:creationId xmlns:a16="http://schemas.microsoft.com/office/drawing/2014/main" xmlns="" id="{5F7265B5-9F97-4F1E-99E9-74F7B7E62337}"/>
               </a:ext>
             </a:extLst>
           </p:cNvPr>
@@ -1286,7 +1286,7 @@
           <p:cNvPr id="11" name="Date Placeholder 10">
             <a:extLst>
               <a:ext uri="{FF2B5EF4-FFF2-40B4-BE49-F238E27FC236}">
-                <a16:creationId xmlns="" xmlns:a16="http://schemas.microsoft.com/office/drawing/2014/main" id="{5C74A470-3BD3-4F33-80E5-67E6E87FCBE7}"/>
+                <a16:creationId xmlns:a16="http://schemas.microsoft.com/office/drawing/2014/main" xmlns="" id="{5C74A470-3BD3-4F33-80E5-67E6E87FCBE7}"/>
               </a:ext>
             </a:extLst>
           </p:cNvPr>
@@ -1304,7 +1304,7 @@
           <a:p>
             <a:fld id="{ED291B17-9318-49DB-B28B-6E5994AE9581}" type="datetime1">
               <a:rPr lang="en-US" smtClean="0"/>
-              <a:t>9/28/2026</a:t>
+              <a:t>9/30/2026</a:t>
             </a:fld>
             <a:endParaRPr lang="en-US"/>
           </a:p>
@@ -1315,7 +1315,7 @@
           <p:cNvPr id="12" name="Footer Placeholder 11">
             <a:extLst>
               <a:ext uri="{FF2B5EF4-FFF2-40B4-BE49-F238E27FC236}">
-                <a16:creationId xmlns="" xmlns:a16="http://schemas.microsoft.com/office/drawing/2014/main" id="{9A3A30BA-DB50-4D7D-BCDE-17D20FB354DF}"/>
+                <a16:creationId xmlns:a16="http://schemas.microsoft.com/office/drawing/2014/main" xmlns="" id="{9A3A30BA-DB50-4D7D-BCDE-17D20FB354DF}"/>
               </a:ext>
             </a:extLst>
           </p:cNvPr>
@@ -1348,7 +1348,7 @@
           <p:cNvPr id="13" name="Slide Number Placeholder 12">
             <a:extLst>
               <a:ext uri="{FF2B5EF4-FFF2-40B4-BE49-F238E27FC236}">
-                <a16:creationId xmlns="" xmlns:a16="http://schemas.microsoft.com/office/drawing/2014/main" id="{76FF9E58-C0B2-436B-A21C-DB45A00D6515}"/>
+                <a16:creationId xmlns:a16="http://schemas.microsoft.com/office/drawing/2014/main" xmlns="" id="{76FF9E58-C0B2-436B-A21C-DB45A00D6515}"/>
               </a:ext>
             </a:extLst>
           </p:cNvPr>
@@ -1490,7 +1490,7 @@
           <p:cNvPr id="8" name="Date Placeholder 7">
             <a:extLst>
               <a:ext uri="{FF2B5EF4-FFF2-40B4-BE49-F238E27FC236}">
-                <a16:creationId xmlns="" xmlns:a16="http://schemas.microsoft.com/office/drawing/2014/main" id="{770E6237-3456-439F-802D-3BA93FC7E3E5}"/>
+                <a16:creationId xmlns:a16="http://schemas.microsoft.com/office/drawing/2014/main" xmlns="" id="{770E6237-3456-439F-802D-3BA93FC7E3E5}"/>
               </a:ext>
             </a:extLst>
           </p:cNvPr>
@@ -1508,7 +1508,7 @@
           <a:p>
             <a:fld id="{78DD82B9-B8EE-4375-B6FF-88FA6ABB15D9}" type="datetime1">
               <a:rPr lang="en-US" smtClean="0"/>
-              <a:t>9/28/2026</a:t>
+              <a:t>9/30/2026</a:t>
             </a:fld>
             <a:endParaRPr lang="en-US"/>
           </a:p>
@@ -1747,7 +1747,7 @@
           <p:cNvPr id="7" name="Date Placeholder 6">
             <a:extLst>
               <a:ext uri="{FF2B5EF4-FFF2-40B4-BE49-F238E27FC236}">
-                <a16:creationId xmlns="" xmlns:a16="http://schemas.microsoft.com/office/drawing/2014/main" id="{61582016-5696-4A93-887F-BBB3B9002FE5}"/>
+                <a16:creationId xmlns:a16="http://schemas.microsoft.com/office/drawing/2014/main" xmlns="" id="{61582016-5696-4A93-887F-BBB3B9002FE5}"/>
               </a:ext>
             </a:extLst>
           </p:cNvPr>
@@ -1765,7 +1765,7 @@
           <a:p>
             <a:fld id="{B2497495-0637-405E-AE64-5CC7506D51F5}" type="datetime1">
               <a:rPr lang="en-US" smtClean="0"/>
-              <a:t>9/28/2026</a:t>
+              <a:t>9/30/2026</a:t>
             </a:fld>
             <a:endParaRPr lang="en-US"/>
           </a:p>
@@ -1776,7 +1776,7 @@
           <p:cNvPr id="9" name="Footer Placeholder 8">
             <a:extLst>
               <a:ext uri="{FF2B5EF4-FFF2-40B4-BE49-F238E27FC236}">
-                <a16:creationId xmlns="" xmlns:a16="http://schemas.microsoft.com/office/drawing/2014/main" id="{857CFCD5-1192-4E18-8A8F-29E153B44DA4}"/>
+                <a16:creationId xmlns:a16="http://schemas.microsoft.com/office/drawing/2014/main" xmlns="" id="{857CFCD5-1192-4E18-8A8F-29E153B44DA4}"/>
               </a:ext>
             </a:extLst>
           </p:cNvPr>
@@ -1809,7 +1809,7 @@
           <p:cNvPr id="10" name="Slide Number Placeholder 9">
             <a:extLst>
               <a:ext uri="{FF2B5EF4-FFF2-40B4-BE49-F238E27FC236}">
-                <a16:creationId xmlns="" xmlns:a16="http://schemas.microsoft.com/office/drawing/2014/main" id="{E39A109E-5018-4794-92B3-FD5E5BCD95E8}"/>
+                <a16:creationId xmlns:a16="http://schemas.microsoft.com/office/drawing/2014/main" xmlns="" id="{E39A109E-5018-4794-92B3-FD5E5BCD95E8}"/>
               </a:ext>
             </a:extLst>
           </p:cNvPr>
@@ -2023,7 +2023,7 @@
           <a:p>
             <a:fld id="{7BFFD690-9426-415D-8B65-26881E07B2D4}" type="datetime1">
               <a:rPr lang="en-US" smtClean="0"/>
-              <a:t>9/28/2026</a:t>
+              <a:t>9/30/2026</a:t>
             </a:fld>
             <a:endParaRPr lang="en-US"/>
           </a:p>
@@ -2450,7 +2450,7 @@
           <a:p>
             <a:fld id="{04C4989A-474C-40DE-95B9-011C28B71673}" type="datetime1">
               <a:rPr lang="en-US" smtClean="0"/>
-              <a:t>9/28/2026</a:t>
+              <a:t>9/30/2026</a:t>
             </a:fld>
             <a:endParaRPr lang="en-US"/>
           </a:p>
@@ -2580,7 +2580,7 @@
           <a:p>
             <a:fld id="{5DB4ED54-5B5E-4A04-93D3-5772E3CE3818}" type="datetime1">
               <a:rPr lang="en-US" smtClean="0"/>
-              <a:t>9/28/2026</a:t>
+              <a:t>9/30/2026</a:t>
             </a:fld>
             <a:endParaRPr lang="en-US"/>
           </a:p>
@@ -2683,7 +2683,7 @@
           <a:p>
             <a:fld id="{4EDE50D6-574B-40AF-946F-D52A04ADE379}" type="datetime1">
               <a:rPr lang="en-US" smtClean="0"/>
-              <a:t>9/28/2026</a:t>
+              <a:t>9/30/2026</a:t>
             </a:fld>
             <a:endParaRPr lang="en-US"/>
           </a:p>
@@ -3043,7 +3043,7 @@
           <p:cNvPr id="8" name="Date Placeholder 7">
             <a:extLst>
               <a:ext uri="{FF2B5EF4-FFF2-40B4-BE49-F238E27FC236}">
-                <a16:creationId xmlns="" xmlns:a16="http://schemas.microsoft.com/office/drawing/2014/main" id="{0B919CC2-2A65-446F-B538-9E6249035445}"/>
+                <a16:creationId xmlns:a16="http://schemas.microsoft.com/office/drawing/2014/main" xmlns="" id="{0B919CC2-2A65-446F-B538-9E6249035445}"/>
               </a:ext>
             </a:extLst>
           </p:cNvPr>
@@ -3066,7 +3066,7 @@
           <a:p>
             <a:fld id="{D82884F1-FFEA-405F-9602-3DCA865EDA4E}" type="datetime1">
               <a:rPr lang="en-US" smtClean="0"/>
-              <a:t>9/28/2026</a:t>
+              <a:t>9/30/2026</a:t>
             </a:fld>
             <a:endParaRPr lang="en-US"/>
           </a:p>
@@ -3077,7 +3077,7 @@
           <p:cNvPr id="10" name="Footer Placeholder 9">
             <a:extLst>
               <a:ext uri="{FF2B5EF4-FFF2-40B4-BE49-F238E27FC236}">
-                <a16:creationId xmlns="" xmlns:a16="http://schemas.microsoft.com/office/drawing/2014/main" id="{B72412AE-119E-4982-8B24-63365EFCA796}"/>
+                <a16:creationId xmlns:a16="http://schemas.microsoft.com/office/drawing/2014/main" xmlns="" id="{B72412AE-119E-4982-8B24-63365EFCA796}"/>
               </a:ext>
             </a:extLst>
           </p:cNvPr>
@@ -3110,7 +3110,7 @@
           <p:cNvPr id="11" name="Slide Number Placeholder 10">
             <a:extLst>
               <a:ext uri="{FF2B5EF4-FFF2-40B4-BE49-F238E27FC236}">
-                <a16:creationId xmlns="" xmlns:a16="http://schemas.microsoft.com/office/drawing/2014/main" id="{7FC4BB19-6AD1-45CF-9F99-00B109890FAB}"/>
+                <a16:creationId xmlns:a16="http://schemas.microsoft.com/office/drawing/2014/main" xmlns="" id="{7FC4BB19-6AD1-45CF-9F99-00B109890FAB}"/>
               </a:ext>
             </a:extLst>
           </p:cNvPr>
@@ -3360,7 +3360,7 @@
           <a:p>
             <a:fld id="{7E18DB4A-8810-4A10-AD5C-D5E2C667F5B3}" type="datetime1">
               <a:rPr lang="en-US" smtClean="0"/>
-              <a:t>9/28/2026</a:t>
+              <a:t>9/30/2026</a:t>
             </a:fld>
             <a:endParaRPr lang="en-US"/>
           </a:p>
@@ -3581,7 +3581,7 @@
           <a:p>
             <a:fld id="{ED291B17-9318-49DB-B28B-6E5994AE9581}" type="datetime1">
               <a:rPr lang="en-US" smtClean="0"/>
-              <a:t>9/28/2026</a:t>
+              <a:t>9/30/2026</a:t>
             </a:fld>
             <a:endParaRPr lang="en-US"/>
           </a:p>
@@ -3745,7 +3745,7 @@
           <p:cNvPr id="8" name="Picture 7" descr="Logo&#10;&#10;Description automatically generated">
             <a:extLst>
               <a:ext uri="{FF2B5EF4-FFF2-40B4-BE49-F238E27FC236}">
-                <a16:creationId xmlns="" xmlns:a16="http://schemas.microsoft.com/office/drawing/2014/main" id="{14A64E4D-8DED-7830-2955-1BE78C5B0655}"/>
+                <a16:creationId xmlns:a16="http://schemas.microsoft.com/office/drawing/2014/main" xmlns="" id="{14A64E4D-8DED-7830-2955-1BE78C5B0655}"/>
               </a:ext>
             </a:extLst>
           </p:cNvPr>
@@ -4210,7 +4210,7 @@
           <p:cNvPr id="2" name="Title 1">
             <a:extLst>
               <a:ext uri="{FF2B5EF4-FFF2-40B4-BE49-F238E27FC236}">
-                <a16:creationId xmlns="" xmlns:a16="http://schemas.microsoft.com/office/drawing/2014/main" id="{A8A11E26-4C38-41A6-9857-11032CEECD80}"/>
+                <a16:creationId xmlns:a16="http://schemas.microsoft.com/office/drawing/2014/main" xmlns="" id="{A8A11E26-4C38-41A6-9857-11032CEECD80}"/>
               </a:ext>
             </a:extLst>
           </p:cNvPr>
@@ -4427,27 +4427,7 @@
                 <a:latin typeface="Arial"/>
                 <a:cs typeface="Arial"/>
               </a:rPr>
-              <a:t>Name – </a:t>
-            </a:r>
-            <a:r>
-              <a:rPr lang="en-US" sz="2000" b="1" dirty="0" smtClean="0">
-                <a:solidFill>
-                  <a:schemeClr val="bg1"/>
-                </a:solidFill>
-                <a:latin typeface="Arial"/>
-                <a:cs typeface="Arial"/>
-              </a:rPr>
-              <a:t>Sri Guru Nanak Dev </a:t>
-            </a:r>
-            <a:r>
-              <a:rPr lang="en-US" sz="2000" b="1" dirty="0" smtClean="0">
-                <a:solidFill>
-                  <a:schemeClr val="bg1"/>
-                </a:solidFill>
-                <a:latin typeface="Arial"/>
-                <a:cs typeface="Arial"/>
-              </a:rPr>
-              <a:t>Khalsa College, University of Delhi</a:t>
+              <a:t>Name – Sri Guru Nanak Dev Khalsa College, University of Delhi</a:t>
             </a:r>
             <a:endParaRPr lang="en-US" sz="2000" b="1" dirty="0">
               <a:solidFill>
@@ -4580,7 +4560,7 @@
           <p:cNvPr id="5" name="Title 4">
             <a:extLst>
               <a:ext uri="{FF2B5EF4-FFF2-40B4-BE49-F238E27FC236}">
-                <a16:creationId xmlns="" xmlns:a16="http://schemas.microsoft.com/office/drawing/2014/main" id="{8FBA75B4-2DD5-42EB-9397-F36BFB8BA723}"/>
+                <a16:creationId xmlns:a16="http://schemas.microsoft.com/office/drawing/2014/main" xmlns="" id="{8FBA75B4-2DD5-42EB-9397-F36BFB8BA723}"/>
               </a:ext>
             </a:extLst>
           </p:cNvPr>
@@ -4723,7 +4703,7 @@
           <p:cNvPr id="5" name="Title 4">
             <a:extLst>
               <a:ext uri="{FF2B5EF4-FFF2-40B4-BE49-F238E27FC236}">
-                <a16:creationId xmlns="" xmlns:a16="http://schemas.microsoft.com/office/drawing/2014/main" id="{8FBA75B4-2DD5-42EB-9397-F36BFB8BA723}"/>
+                <a16:creationId xmlns:a16="http://schemas.microsoft.com/office/drawing/2014/main" xmlns="" id="{8FBA75B4-2DD5-42EB-9397-F36BFB8BA723}"/>
               </a:ext>
             </a:extLst>
           </p:cNvPr>
@@ -4769,7 +4749,7 @@
         </p:nvSpPr>
         <p:spPr>
           <a:xfrm>
-            <a:off x="279366" y="6235998"/>
+            <a:off x="3299884" y="6105812"/>
             <a:ext cx="5389913" cy="400110"/>
           </a:xfrm>
           <a:prstGeom prst="rect">
@@ -4807,58 +4787,36 @@
       </p:sp>
       <p:pic>
         <p:nvPicPr>
-          <p:cNvPr id="8" name="Content Placeholder 7"/>
+          <p:cNvPr id="10" name="Content Placeholder 9"/>
           <p:cNvPicPr>
-            <a:picLocks noGrp="1"/>
+            <a:picLocks noGrp="1" noChangeAspect="1"/>
           </p:cNvPicPr>
           <p:nvPr>
             <p:ph idx="1"/>
           </p:nvPr>
         </p:nvPicPr>
         <p:blipFill>
-          <a:blip r:embed="rId2"/>
+          <a:blip r:embed="rId2">
+            <a:extLst>
+              <a:ext uri="{28A0092B-C50C-407E-A947-70E740481C1C}">
+                <a14:useLocalDpi xmlns:a14="http://schemas.microsoft.com/office/drawing/2010/main" val="0"/>
+              </a:ext>
+            </a:extLst>
+          </a:blip>
           <a:stretch>
             <a:fillRect/>
           </a:stretch>
         </p:blipFill>
         <p:spPr>
           <a:xfrm>
-            <a:off x="713380" y="1432212"/>
-            <a:ext cx="9764213" cy="4673600"/>
+            <a:off x="681237" y="1302026"/>
+            <a:ext cx="10349840" cy="4673600"/>
           </a:xfrm>
-          <a:prstGeom prst="rect">
-            <a:avLst/>
-          </a:prstGeom>
-          <a:solidFill>
-            <a:srgbClr val="FFFFFF">
-              <a:shade val="85000"/>
-            </a:srgbClr>
-          </a:solidFill>
-          <a:ln w="88900" cap="sq">
+          <a:ln w="19050">
             <a:solidFill>
-              <a:srgbClr val="FFFFFF"/>
+              <a:schemeClr val="tx1"/>
             </a:solidFill>
-            <a:miter lim="800000"/>
           </a:ln>
-          <a:effectLst>
-            <a:outerShdw blurRad="55000" dist="18000" dir="5400000" algn="tl" rotWithShape="0">
-              <a:srgbClr val="000000">
-                <a:alpha val="40000"/>
-              </a:srgbClr>
-            </a:outerShdw>
-          </a:effectLst>
-          <a:scene3d>
-            <a:camera prst="orthographicFront"/>
-            <a:lightRig rig="twoPt" dir="t">
-              <a:rot lat="0" lon="0" rev="7200000"/>
-            </a:lightRig>
-          </a:scene3d>
-          <a:sp3d>
-            <a:bevelT w="25400" h="19050"/>
-            <a:contourClr>
-              <a:srgbClr val="FFFFFF"/>
-            </a:contourClr>
-          </a:sp3d>
         </p:spPr>
       </p:pic>
     </p:spTree>
@@ -4903,7 +4861,7 @@
           <p:cNvPr id="5" name="Title 4">
             <a:extLst>
               <a:ext uri="{FF2B5EF4-FFF2-40B4-BE49-F238E27FC236}">
-                <a16:creationId xmlns="" xmlns:a16="http://schemas.microsoft.com/office/drawing/2014/main" id="{8FBA75B4-2DD5-42EB-9397-F36BFB8BA723}"/>
+                <a16:creationId xmlns:a16="http://schemas.microsoft.com/office/drawing/2014/main" xmlns="" id="{8FBA75B4-2DD5-42EB-9397-F36BFB8BA723}"/>
               </a:ext>
             </a:extLst>
           </p:cNvPr>
@@ -4949,7 +4907,7 @@
         </p:nvSpPr>
         <p:spPr>
           <a:xfrm>
-            <a:off x="581192" y="6235840"/>
+            <a:off x="3869590" y="6105260"/>
             <a:ext cx="4452820" cy="400110"/>
           </a:xfrm>
           <a:prstGeom prst="rect">
@@ -4986,58 +4944,39 @@
       </p:sp>
       <p:pic>
         <p:nvPicPr>
-          <p:cNvPr id="8" name="Content Placeholder 7"/>
+          <p:cNvPr id="7" name="Content Placeholder 6"/>
           <p:cNvPicPr>
-            <a:picLocks noGrp="1"/>
+            <a:picLocks noGrp="1" noChangeAspect="1"/>
           </p:cNvPicPr>
           <p:nvPr>
             <p:ph idx="1"/>
           </p:nvPr>
         </p:nvPicPr>
         <p:blipFill>
-          <a:blip r:embed="rId2"/>
+          <a:blip r:embed="rId2">
+            <a:extLst>
+              <a:ext uri="{28A0092B-C50C-407E-A947-70E740481C1C}">
+                <a14:useLocalDpi xmlns:a14="http://schemas.microsoft.com/office/drawing/2010/main" val="0"/>
+              </a:ext>
+            </a:extLst>
+          </a:blip>
           <a:stretch>
             <a:fillRect/>
           </a:stretch>
         </p:blipFill>
         <p:spPr>
           <a:xfrm>
-            <a:off x="759441" y="1432133"/>
-            <a:ext cx="8780148" cy="4673600"/>
+            <a:off x="644413" y="1301750"/>
+            <a:ext cx="10903174" cy="4673600"/>
           </a:xfrm>
-          <a:prstGeom prst="rect">
-            <a:avLst/>
-          </a:prstGeom>
-          <a:solidFill>
-            <a:srgbClr val="FFFFFF">
-              <a:shade val="85000"/>
-            </a:srgbClr>
-          </a:solidFill>
-          <a:ln w="88900" cap="sq">
+          <a:ln w="19050">
             <a:solidFill>
-              <a:srgbClr val="FFFFFF"/>
+              <a:schemeClr val="tx1"/>
             </a:solidFill>
-            <a:miter lim="800000"/>
           </a:ln>
           <a:effectLst>
-            <a:outerShdw blurRad="55000" dist="18000" dir="5400000" algn="tl" rotWithShape="0">
-              <a:srgbClr val="000000">
-                <a:alpha val="40000"/>
-              </a:srgbClr>
-            </a:outerShdw>
+            <a:softEdge rad="0"/>
           </a:effectLst>
-          <a:scene3d>
-            <a:camera prst="orthographicFront"/>
-            <a:lightRig rig="twoPt" dir="t">
-              <a:rot lat="0" lon="0" rev="7200000"/>
-            </a:lightRig>
-          </a:scene3d>
-          <a:sp3d>
-            <a:bevelT w="25400" h="19050"/>
-            <a:contourClr>
-              <a:srgbClr val="FFFFFF"/>
-            </a:contourClr>
-          </a:sp3d>
         </p:spPr>
       </p:pic>
     </p:spTree>
@@ -5082,7 +5021,7 @@
           <p:cNvPr id="5" name="Title 4">
             <a:extLst>
               <a:ext uri="{FF2B5EF4-FFF2-40B4-BE49-F238E27FC236}">
-                <a16:creationId xmlns="" xmlns:a16="http://schemas.microsoft.com/office/drawing/2014/main" id="{8FBA75B4-2DD5-42EB-9397-F36BFB8BA723}"/>
+                <a16:creationId xmlns:a16="http://schemas.microsoft.com/office/drawing/2014/main" xmlns="" id="{8FBA75B4-2DD5-42EB-9397-F36BFB8BA723}"/>
               </a:ext>
             </a:extLst>
           </p:cNvPr>
@@ -5128,7 +5067,7 @@
         </p:nvSpPr>
         <p:spPr>
           <a:xfrm>
-            <a:off x="581191" y="6301886"/>
+            <a:off x="3278345" y="6105812"/>
             <a:ext cx="5020711" cy="400110"/>
           </a:xfrm>
           <a:prstGeom prst="rect">
@@ -5165,58 +5104,36 @@
       </p:sp>
       <p:pic>
         <p:nvPicPr>
-          <p:cNvPr id="6" name="Content Placeholder 5"/>
+          <p:cNvPr id="8" name="Content Placeholder 7"/>
           <p:cNvPicPr>
-            <a:picLocks noGrp="1"/>
+            <a:picLocks noGrp="1" noChangeAspect="1"/>
           </p:cNvPicPr>
           <p:nvPr>
             <p:ph idx="1"/>
           </p:nvPr>
         </p:nvPicPr>
         <p:blipFill>
-          <a:blip r:embed="rId2"/>
+          <a:blip r:embed="rId2">
+            <a:extLst>
+              <a:ext uri="{28A0092B-C50C-407E-A947-70E740481C1C}">
+                <a14:useLocalDpi xmlns:a14="http://schemas.microsoft.com/office/drawing/2010/main" val="0"/>
+              </a:ext>
+            </a:extLst>
+          </a:blip>
           <a:stretch>
             <a:fillRect/>
           </a:stretch>
         </p:blipFill>
         <p:spPr>
           <a:xfrm>
-            <a:off x="764072" y="1470634"/>
-            <a:ext cx="8771566" cy="4673600"/>
+            <a:off x="666948" y="1302026"/>
+            <a:ext cx="10243507" cy="4673600"/>
           </a:xfrm>
-          <a:prstGeom prst="rect">
-            <a:avLst/>
-          </a:prstGeom>
-          <a:solidFill>
-            <a:srgbClr val="FFFFFF">
-              <a:shade val="85000"/>
-            </a:srgbClr>
-          </a:solidFill>
-          <a:ln w="88900" cap="sq">
+          <a:ln w="19050">
             <a:solidFill>
-              <a:srgbClr val="FFFFFF"/>
+              <a:schemeClr val="tx1"/>
             </a:solidFill>
-            <a:miter lim="800000"/>
           </a:ln>
-          <a:effectLst>
-            <a:outerShdw blurRad="55000" dist="18000" dir="5400000" algn="tl" rotWithShape="0">
-              <a:srgbClr val="000000">
-                <a:alpha val="40000"/>
-              </a:srgbClr>
-            </a:outerShdw>
-          </a:effectLst>
-          <a:scene3d>
-            <a:camera prst="orthographicFront"/>
-            <a:lightRig rig="twoPt" dir="t">
-              <a:rot lat="0" lon="0" rev="7200000"/>
-            </a:lightRig>
-          </a:scene3d>
-          <a:sp3d>
-            <a:bevelT w="25400" h="19050"/>
-            <a:contourClr>
-              <a:srgbClr val="FFFFFF"/>
-            </a:contourClr>
-          </a:sp3d>
         </p:spPr>
       </p:pic>
     </p:spTree>
@@ -5261,7 +5178,7 @@
           <p:cNvPr id="5" name="Title 4">
             <a:extLst>
               <a:ext uri="{FF2B5EF4-FFF2-40B4-BE49-F238E27FC236}">
-                <a16:creationId xmlns="" xmlns:a16="http://schemas.microsoft.com/office/drawing/2014/main" id="{8FBA75B4-2DD5-42EB-9397-F36BFB8BA723}"/>
+                <a16:creationId xmlns:a16="http://schemas.microsoft.com/office/drawing/2014/main" xmlns="" id="{8FBA75B4-2DD5-42EB-9397-F36BFB8BA723}"/>
               </a:ext>
             </a:extLst>
           </p:cNvPr>
@@ -5307,7 +5224,7 @@
         </p:nvSpPr>
         <p:spPr>
           <a:xfrm>
-            <a:off x="581191" y="6235840"/>
+            <a:off x="3706640" y="6205860"/>
             <a:ext cx="4395069" cy="400110"/>
           </a:xfrm>
           <a:prstGeom prst="rect">
@@ -5344,58 +5261,36 @@
       </p:sp>
       <p:pic>
         <p:nvPicPr>
-          <p:cNvPr id="6" name="Content Placeholder 5"/>
+          <p:cNvPr id="4" name="Content Placeholder 3"/>
           <p:cNvPicPr>
-            <a:picLocks noGrp="1"/>
+            <a:picLocks noGrp="1" noChangeAspect="1"/>
           </p:cNvPicPr>
           <p:nvPr>
             <p:ph idx="1"/>
           </p:nvPr>
         </p:nvPicPr>
         <p:blipFill>
-          <a:blip r:embed="rId2"/>
+          <a:blip r:embed="rId2">
+            <a:extLst>
+              <a:ext uri="{28A0092B-C50C-407E-A947-70E740481C1C}">
+                <a14:useLocalDpi xmlns:a14="http://schemas.microsoft.com/office/drawing/2010/main" val="0"/>
+              </a:ext>
+            </a:extLst>
+          </a:blip>
           <a:stretch>
             <a:fillRect/>
           </a:stretch>
         </p:blipFill>
         <p:spPr>
           <a:xfrm>
-            <a:off x="715946" y="1432133"/>
-            <a:ext cx="9212846" cy="4673600"/>
+            <a:off x="657799" y="1376701"/>
+            <a:ext cx="10231826" cy="4673600"/>
           </a:xfrm>
-          <a:prstGeom prst="rect">
-            <a:avLst/>
-          </a:prstGeom>
-          <a:solidFill>
-            <a:srgbClr val="FFFFFF">
-              <a:shade val="85000"/>
-            </a:srgbClr>
-          </a:solidFill>
-          <a:ln w="88900" cap="sq">
+          <a:ln w="19050">
             <a:solidFill>
-              <a:srgbClr val="FFFFFF"/>
+              <a:schemeClr val="tx1"/>
             </a:solidFill>
-            <a:miter lim="800000"/>
           </a:ln>
-          <a:effectLst>
-            <a:outerShdw blurRad="55000" dist="18000" dir="5400000" algn="tl" rotWithShape="0">
-              <a:srgbClr val="000000">
-                <a:alpha val="40000"/>
-              </a:srgbClr>
-            </a:outerShdw>
-          </a:effectLst>
-          <a:scene3d>
-            <a:camera prst="orthographicFront"/>
-            <a:lightRig rig="twoPt" dir="t">
-              <a:rot lat="0" lon="0" rev="7200000"/>
-            </a:lightRig>
-          </a:scene3d>
-          <a:sp3d>
-            <a:bevelT w="25400" h="19050"/>
-            <a:contourClr>
-              <a:srgbClr val="FFFFFF"/>
-            </a:contourClr>
-          </a:sp3d>
         </p:spPr>
       </p:pic>
     </p:spTree>
@@ -5440,7 +5335,7 @@
           <p:cNvPr id="5" name="Title 4">
             <a:extLst>
               <a:ext uri="{FF2B5EF4-FFF2-40B4-BE49-F238E27FC236}">
-                <a16:creationId xmlns="" xmlns:a16="http://schemas.microsoft.com/office/drawing/2014/main" id="{8FBA75B4-2DD5-42EB-9397-F36BFB8BA723}"/>
+                <a16:creationId xmlns:a16="http://schemas.microsoft.com/office/drawing/2014/main" xmlns="" id="{8FBA75B4-2DD5-42EB-9397-F36BFB8BA723}"/>
               </a:ext>
             </a:extLst>
           </p:cNvPr>
@@ -5483,7 +5378,7 @@
           <p:cNvPr id="2" name="Content Placeholder 1">
             <a:extLst>
               <a:ext uri="{FF2B5EF4-FFF2-40B4-BE49-F238E27FC236}">
-                <a16:creationId xmlns="" xmlns:a16="http://schemas.microsoft.com/office/drawing/2014/main" id="{005E46AB-32C4-4B57-A2B1-50738A64BE1B}"/>
+                <a16:creationId xmlns:a16="http://schemas.microsoft.com/office/drawing/2014/main" xmlns="" id="{005E46AB-32C4-4B57-A2B1-50738A64BE1B}"/>
               </a:ext>
             </a:extLst>
           </p:cNvPr>
@@ -5608,7 +5503,7 @@
           <p:cNvPr id="3" name="Content Placeholder 2">
             <a:extLst>
               <a:ext uri="{FF2B5EF4-FFF2-40B4-BE49-F238E27FC236}">
-                <a16:creationId xmlns="" xmlns:a16="http://schemas.microsoft.com/office/drawing/2014/main" id="{A6638FD1-D00E-E75B-705C-564F06D93D7B}"/>
+                <a16:creationId xmlns:a16="http://schemas.microsoft.com/office/drawing/2014/main" xmlns="" id="{A6638FD1-D00E-E75B-705C-564F06D93D7B}"/>
               </a:ext>
             </a:extLst>
           </p:cNvPr>
@@ -5919,7 +5814,7 @@
           <p:cNvPr id="5" name="Title 4">
             <a:extLst>
               <a:ext uri="{FF2B5EF4-FFF2-40B4-BE49-F238E27FC236}">
-                <a16:creationId xmlns="" xmlns:a16="http://schemas.microsoft.com/office/drawing/2014/main" id="{3F968F13-9AC4-7120-7ACD-9F752C767D5D}"/>
+                <a16:creationId xmlns:a16="http://schemas.microsoft.com/office/drawing/2014/main" xmlns="" id="{3F968F13-9AC4-7120-7ACD-9F752C767D5D}"/>
               </a:ext>
             </a:extLst>
           </p:cNvPr>
@@ -6075,7 +5970,7 @@
           <p:cNvPr id="5" name="Title 4">
             <a:extLst>
               <a:ext uri="{FF2B5EF4-FFF2-40B4-BE49-F238E27FC236}">
-                <a16:creationId xmlns="" xmlns:a16="http://schemas.microsoft.com/office/drawing/2014/main" id="{8FBA75B4-2DD5-42EB-9397-F36BFB8BA723}"/>
+                <a16:creationId xmlns:a16="http://schemas.microsoft.com/office/drawing/2014/main" xmlns="" id="{8FBA75B4-2DD5-42EB-9397-F36BFB8BA723}"/>
               </a:ext>
             </a:extLst>
           </p:cNvPr>
@@ -6884,7 +6779,7 @@
           <p:cNvPr id="2" name="Title 1">
             <a:extLst>
               <a:ext uri="{FF2B5EF4-FFF2-40B4-BE49-F238E27FC236}">
-                <a16:creationId xmlns="" xmlns:a16="http://schemas.microsoft.com/office/drawing/2014/main" id="{3B4D7422-ED9D-D856-C6AD-0F1A715C2428}"/>
+                <a16:creationId xmlns:a16="http://schemas.microsoft.com/office/drawing/2014/main" xmlns="" id="{3B4D7422-ED9D-D856-C6AD-0F1A715C2428}"/>
               </a:ext>
             </a:extLst>
           </p:cNvPr>
@@ -6925,7 +6820,7 @@
           <p:cNvPr id="3" name="Content Placeholder 2">
             <a:extLst>
               <a:ext uri="{FF2B5EF4-FFF2-40B4-BE49-F238E27FC236}">
-                <a16:creationId xmlns="" xmlns:a16="http://schemas.microsoft.com/office/drawing/2014/main" id="{618C47C2-EF01-12B0-99EA-861F9629D1D9}"/>
+                <a16:creationId xmlns:a16="http://schemas.microsoft.com/office/drawing/2014/main" xmlns="" id="{618C47C2-EF01-12B0-99EA-861F9629D1D9}"/>
               </a:ext>
             </a:extLst>
           </p:cNvPr>
@@ -7042,7 +6937,7 @@
           <p:cNvPr id="5" name="Title 4">
             <a:extLst>
               <a:ext uri="{FF2B5EF4-FFF2-40B4-BE49-F238E27FC236}">
-                <a16:creationId xmlns="" xmlns:a16="http://schemas.microsoft.com/office/drawing/2014/main" id="{8BE4CA82-64EC-4D4E-A5E5-3EBB66E7B24C}"/>
+                <a16:creationId xmlns:a16="http://schemas.microsoft.com/office/drawing/2014/main" xmlns="" id="{8BE4CA82-64EC-4D4E-A5E5-3EBB66E7B24C}"/>
               </a:ext>
             </a:extLst>
           </p:cNvPr>
@@ -7121,7 +7016,7 @@
           <p:cNvPr id="2" name="Title 1">
             <a:extLst>
               <a:ext uri="{FF2B5EF4-FFF2-40B4-BE49-F238E27FC236}">
-                <a16:creationId xmlns="" xmlns:a16="http://schemas.microsoft.com/office/drawing/2014/main" id="{49FFEB4C-F209-4AE7-AA2B-B3C26CE2C51D}"/>
+                <a16:creationId xmlns:a16="http://schemas.microsoft.com/office/drawing/2014/main" xmlns="" id="{49FFEB4C-F209-4AE7-AA2B-B3C26CE2C51D}"/>
               </a:ext>
             </a:extLst>
           </p:cNvPr>
@@ -7162,7 +7057,7 @@
           <p:cNvPr id="3" name="Content Placeholder 2">
             <a:extLst>
               <a:ext uri="{FF2B5EF4-FFF2-40B4-BE49-F238E27FC236}">
-                <a16:creationId xmlns="" xmlns:a16="http://schemas.microsoft.com/office/drawing/2014/main" id="{B2678641-EEA3-4EC4-BF39-4075B0C120E8}"/>
+                <a16:creationId xmlns:a16="http://schemas.microsoft.com/office/drawing/2014/main" xmlns="" id="{B2678641-EEA3-4EC4-BF39-4075B0C120E8}"/>
               </a:ext>
             </a:extLst>
           </p:cNvPr>
@@ -7364,7 +7259,7 @@
           <p:cNvPr id="5" name="Title 4">
             <a:extLst>
               <a:ext uri="{FF2B5EF4-FFF2-40B4-BE49-F238E27FC236}">
-                <a16:creationId xmlns="" xmlns:a16="http://schemas.microsoft.com/office/drawing/2014/main" id="{8FBA75B4-2DD5-42EB-9397-F36BFB8BA723}"/>
+                <a16:creationId xmlns:a16="http://schemas.microsoft.com/office/drawing/2014/main" xmlns="" id="{8FBA75B4-2DD5-42EB-9397-F36BFB8BA723}"/>
               </a:ext>
             </a:extLst>
           </p:cNvPr>
@@ -7406,7 +7301,7 @@
           <p:cNvPr id="2" name="Content Placeholder 1">
             <a:extLst>
               <a:ext uri="{FF2B5EF4-FFF2-40B4-BE49-F238E27FC236}">
-                <a16:creationId xmlns="" xmlns:a16="http://schemas.microsoft.com/office/drawing/2014/main" id="{8FEE4A9C-3F57-7DA7-91FD-715C3FB47F93}"/>
+                <a16:creationId xmlns:a16="http://schemas.microsoft.com/office/drawing/2014/main" xmlns="" id="{8FEE4A9C-3F57-7DA7-91FD-715C3FB47F93}"/>
               </a:ext>
             </a:extLst>
           </p:cNvPr>
@@ -7510,7 +7405,7 @@
           <p:cNvPr id="5" name="Title 4">
             <a:extLst>
               <a:ext uri="{FF2B5EF4-FFF2-40B4-BE49-F238E27FC236}">
-                <a16:creationId xmlns="" xmlns:a16="http://schemas.microsoft.com/office/drawing/2014/main" id="{8FBA75B4-2DD5-42EB-9397-F36BFB8BA723}"/>
+                <a16:creationId xmlns:a16="http://schemas.microsoft.com/office/drawing/2014/main" xmlns="" id="{8FBA75B4-2DD5-42EB-9397-F36BFB8BA723}"/>
               </a:ext>
             </a:extLst>
           </p:cNvPr>
@@ -7552,7 +7447,7 @@
           <p:cNvPr id="2" name="Content Placeholder 1">
             <a:extLst>
               <a:ext uri="{FF2B5EF4-FFF2-40B4-BE49-F238E27FC236}">
-                <a16:creationId xmlns="" xmlns:a16="http://schemas.microsoft.com/office/drawing/2014/main" id="{E041FD9D-DF07-9C37-1E61-1D920E0EF1D4}"/>
+                <a16:creationId xmlns:a16="http://schemas.microsoft.com/office/drawing/2014/main" xmlns="" id="{E041FD9D-DF07-9C37-1E61-1D920E0EF1D4}"/>
               </a:ext>
             </a:extLst>
           </p:cNvPr>
@@ -7955,7 +7850,7 @@
           <p:cNvPr id="5" name="Title 4">
             <a:extLst>
               <a:ext uri="{FF2B5EF4-FFF2-40B4-BE49-F238E27FC236}">
-                <a16:creationId xmlns="" xmlns:a16="http://schemas.microsoft.com/office/drawing/2014/main" id="{8FBA75B4-2DD5-42EB-9397-F36BFB8BA723}"/>
+                <a16:creationId xmlns:a16="http://schemas.microsoft.com/office/drawing/2014/main" xmlns="" id="{8FBA75B4-2DD5-42EB-9397-F36BFB8BA723}"/>
               </a:ext>
             </a:extLst>
           </p:cNvPr>
@@ -8015,7 +7910,7 @@
           <p:cNvPr id="2" name="Content Placeholder 1">
             <a:extLst>
               <a:ext uri="{FF2B5EF4-FFF2-40B4-BE49-F238E27FC236}">
-                <a16:creationId xmlns="" xmlns:a16="http://schemas.microsoft.com/office/drawing/2014/main" id="{C4FFAF3C-BA60-9181-132C-C36C403AAEA7}"/>
+                <a16:creationId xmlns:a16="http://schemas.microsoft.com/office/drawing/2014/main" xmlns="" id="{C4FFAF3C-BA60-9181-132C-C36C403AAEA7}"/>
               </a:ext>
             </a:extLst>
           </p:cNvPr>
@@ -9936,7 +9831,7 @@
           <p:cNvPr id="5" name="Title 4">
             <a:extLst>
               <a:ext uri="{FF2B5EF4-FFF2-40B4-BE49-F238E27FC236}">
-                <a16:creationId xmlns="" xmlns:a16="http://schemas.microsoft.com/office/drawing/2014/main" id="{8FBA75B4-2DD5-42EB-9397-F36BFB8BA723}"/>
+                <a16:creationId xmlns:a16="http://schemas.microsoft.com/office/drawing/2014/main" xmlns="" id="{8FBA75B4-2DD5-42EB-9397-F36BFB8BA723}"/>
               </a:ext>
             </a:extLst>
           </p:cNvPr>
@@ -9979,7 +9874,7 @@
           <p:cNvPr id="2" name="Content Placeholder 1">
             <a:extLst>
               <a:ext uri="{FF2B5EF4-FFF2-40B4-BE49-F238E27FC236}">
-                <a16:creationId xmlns="" xmlns:a16="http://schemas.microsoft.com/office/drawing/2014/main" id="{F7F0871F-2198-9E37-C96F-3611AA199B60}"/>
+                <a16:creationId xmlns:a16="http://schemas.microsoft.com/office/drawing/2014/main" xmlns="" id="{F7F0871F-2198-9E37-C96F-3611AA199B60}"/>
               </a:ext>
             </a:extLst>
           </p:cNvPr>
@@ -10498,7 +10393,7 @@
           <p:cNvPr id="5" name="Title 4">
             <a:extLst>
               <a:ext uri="{FF2B5EF4-FFF2-40B4-BE49-F238E27FC236}">
-                <a16:creationId xmlns="" xmlns:a16="http://schemas.microsoft.com/office/drawing/2014/main" id="{8FBA75B4-2DD5-42EB-9397-F36BFB8BA723}"/>
+                <a16:creationId xmlns:a16="http://schemas.microsoft.com/office/drawing/2014/main" xmlns="" id="{8FBA75B4-2DD5-42EB-9397-F36BFB8BA723}"/>
               </a:ext>
             </a:extLst>
           </p:cNvPr>
@@ -11183,24 +11078,6 @@
 </file>
 
 <file path=customXml/item1.xml><?xml version="1.0" encoding="utf-8"?>
-<?mso-contentType ?>
-<FormTemplates xmlns="http://schemas.microsoft.com/sharepoint/v3/contenttype/forms">
-  <Display>DocumentLibraryForm</Display>
-  <Edit>DocumentLibraryForm</Edit>
-  <New>DocumentLibraryForm</New>
-</FormTemplates>
-</file>
-
-<file path=customXml/item2.xml><?xml version="1.0" encoding="utf-8"?>
-<p:properties xmlns:p="http://schemas.microsoft.com/office/2006/metadata/properties" xmlns:xsi="http://www.w3.org/2001/XMLSchema-instance" xmlns:pc="http://schemas.microsoft.com/office/infopath/2007/PartnerControls">
-  <documentManagement>
-    <MediaServiceKeyPoints xmlns="9162bd5b-4ed9-4da3-b376-05204580ba3f" xsi:nil="true"/>
-    <_activity xmlns="9162bd5b-4ed9-4da3-b376-05204580ba3f" xsi:nil="true"/>
-  </documentManagement>
-</p:properties>
-</file>
-
-<file path=customXml/item3.xml><?xml version="1.0" encoding="utf-8"?>
 <ct:contentTypeSchema xmlns:ct="http://schemas.microsoft.com/office/2006/metadata/contentType" xmlns:ma="http://schemas.microsoft.com/office/2006/metadata/properties/metaAttributes" ct:_="" ma:_="" ma:contentTypeName="Document" ma:contentTypeID="0x0101000F1872188ABCFC48BECA6C87E8AC3285" ma:contentTypeVersion="17" ma:contentTypeDescription="Create a new document." ma:contentTypeScope="" ma:versionID="55a158675e089c6a85ab0f83b89e1a15">
   <xsd:schema xmlns:xsd="http://www.w3.org/2001/XMLSchema" xmlns:xs="http://www.w3.org/2001/XMLSchema" xmlns:p="http://schemas.microsoft.com/office/2006/metadata/properties" xmlns:ns3="9162bd5b-4ed9-4da3-b376-05204580ba3f" xmlns:ns4="c0fa2617-96bd-425d-8578-e93563fe37c5" targetNamespace="http://schemas.microsoft.com/office/2006/metadata/properties" ma:root="true" ma:fieldsID="b35f082308864fa161c4a0a9eca35eff" ns3:_="" ns4:_="">
     <xsd:import namespace="9162bd5b-4ed9-4da3-b376-05204580ba3f"/>
@@ -11447,10 +11324,39 @@
 </ct:contentTypeSchema>
 </file>
 
+<file path=customXml/item2.xml><?xml version="1.0" encoding="utf-8"?>
+<p:properties xmlns:p="http://schemas.microsoft.com/office/2006/metadata/properties" xmlns:xsi="http://www.w3.org/2001/XMLSchema-instance" xmlns:pc="http://schemas.microsoft.com/office/infopath/2007/PartnerControls">
+  <documentManagement>
+    <MediaServiceKeyPoints xmlns="9162bd5b-4ed9-4da3-b376-05204580ba3f" xsi:nil="true"/>
+    <_activity xmlns="9162bd5b-4ed9-4da3-b376-05204580ba3f" xsi:nil="true"/>
+  </documentManagement>
+</p:properties>
+</file>
+
+<file path=customXml/item3.xml><?xml version="1.0" encoding="utf-8"?>
+<?mso-contentType ?>
+<FormTemplates xmlns="http://schemas.microsoft.com/sharepoint/v3/contenttype/forms">
+  <Display>DocumentLibraryForm</Display>
+  <Edit>DocumentLibraryForm</Edit>
+  <New>DocumentLibraryForm</New>
+</FormTemplates>
+</file>
+
 <file path=customXml/itemProps1.xml><?xml version="1.0" encoding="utf-8"?>
-<ds:datastoreItem xmlns:ds="http://schemas.openxmlformats.org/officeDocument/2006/customXml" ds:itemID="{927BD4C1-B6B1-4715-ABF9-E660A51A4EA0}">
+<ds:datastoreItem xmlns:ds="http://schemas.openxmlformats.org/officeDocument/2006/customXml" ds:itemID="{6E816721-11E4-4989-8472-AB5A7EC20404}">
   <ds:schemaRefs>
-    <ds:schemaRef ds:uri="http://schemas.microsoft.com/sharepoint/v3/contenttype/forms"/>
+    <ds:schemaRef ds:uri="9162bd5b-4ed9-4da3-b376-05204580ba3f"/>
+    <ds:schemaRef ds:uri="c0fa2617-96bd-425d-8578-e93563fe37c5"/>
+    <ds:schemaRef ds:uri="http://purl.org/dc/elements/1.1/"/>
+    <ds:schemaRef ds:uri="http://purl.org/dc/terms/"/>
+    <ds:schemaRef ds:uri="http://schemas.microsoft.com/internal/obd"/>
+    <ds:schemaRef ds:uri="http://schemas.microsoft.com/office/2006/documentManagement/types"/>
+    <ds:schemaRef ds:uri="http://schemas.microsoft.com/office/2006/metadata/contentType"/>
+    <ds:schemaRef ds:uri="http://schemas.microsoft.com/office/2006/metadata/properties"/>
+    <ds:schemaRef ds:uri="http://schemas.microsoft.com/office/2006/metadata/properties/metaAttributes"/>
+    <ds:schemaRef ds:uri="http://schemas.microsoft.com/office/infopath/2007/PartnerControls"/>
+    <ds:schemaRef ds:uri="http://schemas.openxmlformats.org/package/2006/metadata/core-properties"/>
+    <ds:schemaRef ds:uri="http://www.w3.org/2001/XMLSchema"/>
   </ds:schemaRefs>
 </ds:datastoreItem>
 </file>
@@ -11473,20 +11379,9 @@
 </file>
 
 <file path=customXml/itemProps3.xml><?xml version="1.0" encoding="utf-8"?>
-<ds:datastoreItem xmlns:ds="http://schemas.openxmlformats.org/officeDocument/2006/customXml" ds:itemID="{6E816721-11E4-4989-8472-AB5A7EC20404}">
+<ds:datastoreItem xmlns:ds="http://schemas.openxmlformats.org/officeDocument/2006/customXml" ds:itemID="{927BD4C1-B6B1-4715-ABF9-E660A51A4EA0}">
   <ds:schemaRefs>
-    <ds:schemaRef ds:uri="9162bd5b-4ed9-4da3-b376-05204580ba3f"/>
-    <ds:schemaRef ds:uri="c0fa2617-96bd-425d-8578-e93563fe37c5"/>
-    <ds:schemaRef ds:uri="http://purl.org/dc/elements/1.1/"/>
-    <ds:schemaRef ds:uri="http://purl.org/dc/terms/"/>
-    <ds:schemaRef ds:uri="http://schemas.microsoft.com/internal/obd"/>
-    <ds:schemaRef ds:uri="http://schemas.microsoft.com/office/2006/documentManagement/types"/>
-    <ds:schemaRef ds:uri="http://schemas.microsoft.com/office/2006/metadata/contentType"/>
-    <ds:schemaRef ds:uri="http://schemas.microsoft.com/office/2006/metadata/properties"/>
-    <ds:schemaRef ds:uri="http://schemas.microsoft.com/office/2006/metadata/properties/metaAttributes"/>
-    <ds:schemaRef ds:uri="http://schemas.microsoft.com/office/infopath/2007/PartnerControls"/>
-    <ds:schemaRef ds:uri="http://schemas.openxmlformats.org/package/2006/metadata/core-properties"/>
-    <ds:schemaRef ds:uri="http://www.w3.org/2001/XMLSchema"/>
+    <ds:schemaRef ds:uri="http://schemas.microsoft.com/sharepoint/v3/contenttype/forms"/>
   </ds:schemaRefs>
 </ds:datastoreItem>
 </file>